--- a/WP4/øresund.work/Øresundsvandssamarbejdet.pptx
+++ b/WP4/øresund.work/Øresundsvandssamarbejdet.pptx
@@ -7,8 +7,9 @@
   <p:sldIdLst>
     <p:sldId id="256" r:id="rId2"/>
     <p:sldId id="257" r:id="rId3"/>
-    <p:sldId id="259" r:id="rId4"/>
-    <p:sldId id="258" r:id="rId5"/>
+    <p:sldId id="260" r:id="rId4"/>
+    <p:sldId id="259" r:id="rId5"/>
+    <p:sldId id="258" r:id="rId6"/>
   </p:sldIdLst>
   <p:sldSz cx="12192000" cy="6858000"/>
   <p:notesSz cx="6858000" cy="9144000"/>
@@ -107,7 +108,112 @@
       </a:defRPr>
     </a:lvl9pPr>
   </p:defaultTextStyle>
+  <p:extLst>
+    <p:ext uri="{EFAFB233-063F-42B5-8137-9DF3F51BA10A}">
+      <p15:sldGuideLst xmlns:p15="http://schemas.microsoft.com/office/powerpoint/2012/main"/>
+    </p:ext>
+  </p:extLst>
 </p:presentation>
+</file>
+
+<file path=ppt/revisionInfo.xml><?xml version="1.0" encoding="utf-8"?>
+<p1510:revInfo xmlns:a="http://schemas.openxmlformats.org/drawingml/2006/main" xmlns:r="http://schemas.openxmlformats.org/officeDocument/2006/relationships" xmlns:p1510="http://schemas.microsoft.com/office/powerpoint/2015/10/main">
+  <p1510:revLst>
+    <p1510:client id="{704273BF-7E35-400C-ADD8-CBC796B4BAEF}" v="12" dt="2022-10-18T10:08:09.961"/>
+  </p1510:revLst>
+</p1510:revInfo>
+</file>
+
+<file path=ppt/changesInfos/changesInfo1.xml><?xml version="1.0" encoding="utf-8"?>
+<pc:chgInfo xmlns:a="http://schemas.openxmlformats.org/drawingml/2006/main" xmlns:r="http://schemas.openxmlformats.org/officeDocument/2006/relationships" xmlns:ac="http://schemas.microsoft.com/office/drawing/2013/main/command" xmlns:pc="http://schemas.microsoft.com/office/powerpoint/2013/main/command">
+  <pc:docChgLst>
+    <pc:chgData name="Anna Elizabeth Jorgensen" userId="16327246-ef74-44a4-85d3-b08eb3538015" providerId="ADAL" clId="{704273BF-7E35-400C-ADD8-CBC796B4BAEF}"/>
+    <pc:docChg chg="undo custSel addSld modSld">
+      <pc:chgData name="Anna Elizabeth Jorgensen" userId="16327246-ef74-44a4-85d3-b08eb3538015" providerId="ADAL" clId="{704273BF-7E35-400C-ADD8-CBC796B4BAEF}" dt="2022-10-18T10:08:09.954" v="1059" actId="20577"/>
+      <pc:docMkLst>
+        <pc:docMk/>
+      </pc:docMkLst>
+      <pc:sldChg chg="addSp delSp modSp mod">
+        <pc:chgData name="Anna Elizabeth Jorgensen" userId="16327246-ef74-44a4-85d3-b08eb3538015" providerId="ADAL" clId="{704273BF-7E35-400C-ADD8-CBC796B4BAEF}" dt="2022-10-18T10:08:09.954" v="1059" actId="20577"/>
+        <pc:sldMkLst>
+          <pc:docMk/>
+          <pc:sldMk cId="911899234" sldId="259"/>
+        </pc:sldMkLst>
+        <pc:spChg chg="mod">
+          <ac:chgData name="Anna Elizabeth Jorgensen" userId="16327246-ef74-44a4-85d3-b08eb3538015" providerId="ADAL" clId="{704273BF-7E35-400C-ADD8-CBC796B4BAEF}" dt="2022-10-18T10:08:07.278" v="1058" actId="20577"/>
+          <ac:spMkLst>
+            <pc:docMk/>
+            <pc:sldMk cId="911899234" sldId="259"/>
+            <ac:spMk id="2" creationId="{2F033A66-E0B3-3C8C-BB3D-B857B253BE5C}"/>
+          </ac:spMkLst>
+        </pc:spChg>
+        <pc:spChg chg="del mod">
+          <ac:chgData name="Anna Elizabeth Jorgensen" userId="16327246-ef74-44a4-85d3-b08eb3538015" providerId="ADAL" clId="{704273BF-7E35-400C-ADD8-CBC796B4BAEF}" dt="2022-10-18T08:26:30.581" v="604" actId="478"/>
+          <ac:spMkLst>
+            <pc:docMk/>
+            <pc:sldMk cId="911899234" sldId="259"/>
+            <ac:spMk id="3" creationId="{49D53334-4D21-9267-1C8D-1955C76B4103}"/>
+          </ac:spMkLst>
+        </pc:spChg>
+        <pc:spChg chg="add mod">
+          <ac:chgData name="Anna Elizabeth Jorgensen" userId="16327246-ef74-44a4-85d3-b08eb3538015" providerId="ADAL" clId="{704273BF-7E35-400C-ADD8-CBC796B4BAEF}" dt="2022-10-18T08:42:28.579" v="1052" actId="1076"/>
+          <ac:spMkLst>
+            <pc:docMk/>
+            <pc:sldMk cId="911899234" sldId="259"/>
+            <ac:spMk id="4" creationId="{5DE8078F-3D5D-C3C0-E0B0-8FED5D08C3CA}"/>
+          </ac:spMkLst>
+        </pc:spChg>
+        <pc:spChg chg="add mod">
+          <ac:chgData name="Anna Elizabeth Jorgensen" userId="16327246-ef74-44a4-85d3-b08eb3538015" providerId="ADAL" clId="{704273BF-7E35-400C-ADD8-CBC796B4BAEF}" dt="2022-10-18T10:08:09.954" v="1059" actId="20577"/>
+          <ac:spMkLst>
+            <pc:docMk/>
+            <pc:sldMk cId="911899234" sldId="259"/>
+            <ac:spMk id="5" creationId="{6F88A932-6CB1-CC6B-BEA2-E9DF51336AA3}"/>
+          </ac:spMkLst>
+        </pc:spChg>
+        <pc:spChg chg="add del">
+          <ac:chgData name="Anna Elizabeth Jorgensen" userId="16327246-ef74-44a4-85d3-b08eb3538015" providerId="ADAL" clId="{704273BF-7E35-400C-ADD8-CBC796B4BAEF}" dt="2022-10-18T08:32:46.314" v="870"/>
+          <ac:spMkLst>
+            <pc:docMk/>
+            <pc:sldMk cId="911899234" sldId="259"/>
+            <ac:spMk id="6" creationId="{E33AC285-48CA-80ED-9F69-AFA467B10E7B}"/>
+          </ac:spMkLst>
+        </pc:spChg>
+        <pc:spChg chg="add del">
+          <ac:chgData name="Anna Elizabeth Jorgensen" userId="16327246-ef74-44a4-85d3-b08eb3538015" providerId="ADAL" clId="{704273BF-7E35-400C-ADD8-CBC796B4BAEF}" dt="2022-10-18T08:32:54.355" v="872"/>
+          <ac:spMkLst>
+            <pc:docMk/>
+            <pc:sldMk cId="911899234" sldId="259"/>
+            <ac:spMk id="7" creationId="{97E317C2-EFA2-D243-CE67-F1A44E9C1ACC}"/>
+          </ac:spMkLst>
+        </pc:spChg>
+      </pc:sldChg>
+      <pc:sldChg chg="modSp new mod">
+        <pc:chgData name="Anna Elizabeth Jorgensen" userId="16327246-ef74-44a4-85d3-b08eb3538015" providerId="ADAL" clId="{704273BF-7E35-400C-ADD8-CBC796B4BAEF}" dt="2022-10-18T07:59:14.624" v="519" actId="20577"/>
+        <pc:sldMkLst>
+          <pc:docMk/>
+          <pc:sldMk cId="2860727605" sldId="260"/>
+        </pc:sldMkLst>
+        <pc:spChg chg="mod">
+          <ac:chgData name="Anna Elizabeth Jorgensen" userId="16327246-ef74-44a4-85d3-b08eb3538015" providerId="ADAL" clId="{704273BF-7E35-400C-ADD8-CBC796B4BAEF}" dt="2022-10-18T07:17:44.846" v="14" actId="20577"/>
+          <ac:spMkLst>
+            <pc:docMk/>
+            <pc:sldMk cId="2860727605" sldId="260"/>
+            <ac:spMk id="2" creationId="{E57B938F-8B19-433D-5EB8-B6D224C51AE9}"/>
+          </ac:spMkLst>
+        </pc:spChg>
+        <pc:spChg chg="mod">
+          <ac:chgData name="Anna Elizabeth Jorgensen" userId="16327246-ef74-44a4-85d3-b08eb3538015" providerId="ADAL" clId="{704273BF-7E35-400C-ADD8-CBC796B4BAEF}" dt="2022-10-18T07:59:14.624" v="519" actId="20577"/>
+          <ac:spMkLst>
+            <pc:docMk/>
+            <pc:sldMk cId="2860727605" sldId="260"/>
+            <ac:spMk id="3" creationId="{33D66A41-5C04-48D5-4C16-5A3B7150CBF4}"/>
+          </ac:spMkLst>
+        </pc:spChg>
+      </pc:sldChg>
+    </pc:docChg>
+  </pc:docChgLst>
+</pc:chgInfo>
 </file>
 
 <file path=ppt/slideLayouts/slideLayout1.xml><?xml version="1.0" encoding="utf-8"?>
@@ -259,7 +365,7 @@
           <a:p>
             <a:fld id="{DF331D46-2FE3-4311-8917-511D656E9266}" type="datetimeFigureOut">
               <a:rPr lang="da-DK" smtClean="0"/>
-              <a:t>17-10-2022</a:t>
+              <a:t>18-10-2022</a:t>
             </a:fld>
             <a:endParaRPr lang="da-DK"/>
           </a:p>
@@ -459,7 +565,7 @@
           <a:p>
             <a:fld id="{DF331D46-2FE3-4311-8917-511D656E9266}" type="datetimeFigureOut">
               <a:rPr lang="da-DK" smtClean="0"/>
-              <a:t>17-10-2022</a:t>
+              <a:t>18-10-2022</a:t>
             </a:fld>
             <a:endParaRPr lang="da-DK"/>
           </a:p>
@@ -669,7 +775,7 @@
           <a:p>
             <a:fld id="{DF331D46-2FE3-4311-8917-511D656E9266}" type="datetimeFigureOut">
               <a:rPr lang="da-DK" smtClean="0"/>
-              <a:t>17-10-2022</a:t>
+              <a:t>18-10-2022</a:t>
             </a:fld>
             <a:endParaRPr lang="da-DK"/>
           </a:p>
@@ -869,7 +975,7 @@
           <a:p>
             <a:fld id="{DF331D46-2FE3-4311-8917-511D656E9266}" type="datetimeFigureOut">
               <a:rPr lang="da-DK" smtClean="0"/>
-              <a:t>17-10-2022</a:t>
+              <a:t>18-10-2022</a:t>
             </a:fld>
             <a:endParaRPr lang="da-DK"/>
           </a:p>
@@ -1145,7 +1251,7 @@
           <a:p>
             <a:fld id="{DF331D46-2FE3-4311-8917-511D656E9266}" type="datetimeFigureOut">
               <a:rPr lang="da-DK" smtClean="0"/>
-              <a:t>17-10-2022</a:t>
+              <a:t>18-10-2022</a:t>
             </a:fld>
             <a:endParaRPr lang="da-DK"/>
           </a:p>
@@ -1413,7 +1519,7 @@
           <a:p>
             <a:fld id="{DF331D46-2FE3-4311-8917-511D656E9266}" type="datetimeFigureOut">
               <a:rPr lang="da-DK" smtClean="0"/>
-              <a:t>17-10-2022</a:t>
+              <a:t>18-10-2022</a:t>
             </a:fld>
             <a:endParaRPr lang="da-DK"/>
           </a:p>
@@ -1828,7 +1934,7 @@
           <a:p>
             <a:fld id="{DF331D46-2FE3-4311-8917-511D656E9266}" type="datetimeFigureOut">
               <a:rPr lang="da-DK" smtClean="0"/>
-              <a:t>17-10-2022</a:t>
+              <a:t>18-10-2022</a:t>
             </a:fld>
             <a:endParaRPr lang="da-DK"/>
           </a:p>
@@ -1970,7 +2076,7 @@
           <a:p>
             <a:fld id="{DF331D46-2FE3-4311-8917-511D656E9266}" type="datetimeFigureOut">
               <a:rPr lang="da-DK" smtClean="0"/>
-              <a:t>17-10-2022</a:t>
+              <a:t>18-10-2022</a:t>
             </a:fld>
             <a:endParaRPr lang="da-DK"/>
           </a:p>
@@ -2083,7 +2189,7 @@
           <a:p>
             <a:fld id="{DF331D46-2FE3-4311-8917-511D656E9266}" type="datetimeFigureOut">
               <a:rPr lang="da-DK" smtClean="0"/>
-              <a:t>17-10-2022</a:t>
+              <a:t>18-10-2022</a:t>
             </a:fld>
             <a:endParaRPr lang="da-DK"/>
           </a:p>
@@ -2396,7 +2502,7 @@
           <a:p>
             <a:fld id="{DF331D46-2FE3-4311-8917-511D656E9266}" type="datetimeFigureOut">
               <a:rPr lang="da-DK" smtClean="0"/>
-              <a:t>17-10-2022</a:t>
+              <a:t>18-10-2022</a:t>
             </a:fld>
             <a:endParaRPr lang="da-DK"/>
           </a:p>
@@ -2685,7 +2791,7 @@
           <a:p>
             <a:fld id="{DF331D46-2FE3-4311-8917-511D656E9266}" type="datetimeFigureOut">
               <a:rPr lang="da-DK" smtClean="0"/>
-              <a:t>17-10-2022</a:t>
+              <a:t>18-10-2022</a:t>
             </a:fld>
             <a:endParaRPr lang="da-DK"/>
           </a:p>
@@ -2928,7 +3034,7 @@
           <a:p>
             <a:fld id="{DF331D46-2FE3-4311-8917-511D656E9266}" type="datetimeFigureOut">
               <a:rPr lang="da-DK" smtClean="0"/>
-              <a:t>17-10-2022</a:t>
+              <a:t>18-10-2022</a:t>
             </a:fld>
             <a:endParaRPr lang="da-DK"/>
           </a:p>
@@ -3956,6 +4062,393 @@
           <p:cNvPr id="2" name="Title 1">
             <a:extLst>
               <a:ext uri="{FF2B5EF4-FFF2-40B4-BE49-F238E27FC236}">
+                <a16:creationId xmlns:a16="http://schemas.microsoft.com/office/drawing/2014/main" id="{E57B938F-8B19-433D-5EB8-B6D224C51AE9}"/>
+              </a:ext>
+            </a:extLst>
+          </p:cNvPr>
+          <p:cNvSpPr>
+            <a:spLocks noGrp="1"/>
+          </p:cNvSpPr>
+          <p:nvPr>
+            <p:ph type="title"/>
+          </p:nvPr>
+        </p:nvSpPr>
+        <p:spPr/>
+        <p:txBody>
+          <a:bodyPr/>
+          <a:lstStyle/>
+          <a:p>
+            <a:r>
+              <a:rPr lang="da-DK" dirty="0"/>
+              <a:t>Query </a:t>
+            </a:r>
+            <a:r>
+              <a:rPr lang="da-DK" dirty="0" err="1"/>
+              <a:t>results</a:t>
+            </a:r>
+            <a:endParaRPr lang="da-DK" dirty="0"/>
+          </a:p>
+        </p:txBody>
+      </p:sp>
+      <p:sp>
+        <p:nvSpPr>
+          <p:cNvPr id="3" name="Content Placeholder 2">
+            <a:extLst>
+              <a:ext uri="{FF2B5EF4-FFF2-40B4-BE49-F238E27FC236}">
+                <a16:creationId xmlns:a16="http://schemas.microsoft.com/office/drawing/2014/main" id="{33D66A41-5C04-48D5-4C16-5A3B7150CBF4}"/>
+              </a:ext>
+            </a:extLst>
+          </p:cNvPr>
+          <p:cNvSpPr>
+            <a:spLocks noGrp="1"/>
+          </p:cNvSpPr>
+          <p:nvPr>
+            <p:ph idx="1"/>
+          </p:nvPr>
+        </p:nvSpPr>
+        <p:spPr>
+          <a:xfrm>
+            <a:off x="838200" y="1460500"/>
+            <a:ext cx="10515600" cy="4716463"/>
+          </a:xfrm>
+        </p:spPr>
+        <p:txBody>
+          <a:bodyPr>
+            <a:normAutofit fontScale="85000" lnSpcReduction="20000"/>
+          </a:bodyPr>
+          <a:lstStyle/>
+          <a:p>
+            <a:r>
+              <a:rPr lang="da-DK" dirty="0"/>
+              <a:t>In total </a:t>
+            </a:r>
+            <a:r>
+              <a:rPr lang="da-DK" dirty="0" err="1"/>
+              <a:t>there</a:t>
+            </a:r>
+            <a:r>
+              <a:rPr lang="da-DK" dirty="0"/>
+              <a:t> </a:t>
+            </a:r>
+            <a:r>
+              <a:rPr lang="da-DK" dirty="0" err="1"/>
+              <a:t>are</a:t>
+            </a:r>
+            <a:r>
+              <a:rPr lang="da-DK" dirty="0"/>
+              <a:t> 1,213 </a:t>
+            </a:r>
+            <a:r>
+              <a:rPr lang="da-DK" dirty="0" err="1"/>
+              <a:t>distinct</a:t>
+            </a:r>
+            <a:r>
+              <a:rPr lang="da-DK" dirty="0"/>
+              <a:t> </a:t>
+            </a:r>
+            <a:r>
+              <a:rPr lang="da-DK" dirty="0" err="1"/>
+              <a:t>documents</a:t>
+            </a:r>
+            <a:r>
+              <a:rPr lang="da-DK" dirty="0"/>
+              <a:t>, </a:t>
+            </a:r>
+            <a:r>
+              <a:rPr lang="da-DK" dirty="0" err="1"/>
+              <a:t>some</a:t>
+            </a:r>
+            <a:r>
+              <a:rPr lang="da-DK" dirty="0"/>
+              <a:t> </a:t>
+            </a:r>
+            <a:r>
+              <a:rPr lang="da-DK" dirty="0" err="1"/>
+              <a:t>apprearing</a:t>
+            </a:r>
+            <a:r>
+              <a:rPr lang="da-DK" dirty="0"/>
+              <a:t> in </a:t>
+            </a:r>
+            <a:r>
+              <a:rPr lang="da-DK" dirty="0" err="1"/>
+              <a:t>mutiple</a:t>
+            </a:r>
+            <a:r>
+              <a:rPr lang="da-DK" dirty="0"/>
+              <a:t> </a:t>
+            </a:r>
+            <a:r>
+              <a:rPr lang="da-DK" dirty="0" err="1"/>
+              <a:t>search</a:t>
+            </a:r>
+            <a:r>
+              <a:rPr lang="da-DK" dirty="0"/>
+              <a:t> </a:t>
+            </a:r>
+            <a:r>
+              <a:rPr lang="da-DK" dirty="0" err="1"/>
+              <a:t>queries</a:t>
+            </a:r>
+            <a:r>
+              <a:rPr lang="da-DK" dirty="0"/>
+              <a:t>. One of the </a:t>
+            </a:r>
+            <a:r>
+              <a:rPr lang="da-DK" dirty="0" err="1"/>
+              <a:t>documents</a:t>
+            </a:r>
+            <a:r>
+              <a:rPr lang="da-DK" dirty="0"/>
+              <a:t> pulled has a </a:t>
+            </a:r>
+            <a:r>
+              <a:rPr lang="da-DK" dirty="0" err="1"/>
+              <a:t>faulty</a:t>
+            </a:r>
+            <a:r>
+              <a:rPr lang="da-DK" dirty="0"/>
+              <a:t> url and </a:t>
+            </a:r>
+            <a:r>
+              <a:rPr lang="da-DK" dirty="0" err="1"/>
+              <a:t>thus</a:t>
+            </a:r>
+            <a:r>
+              <a:rPr lang="da-DK" dirty="0"/>
+              <a:t> </a:t>
+            </a:r>
+            <a:r>
+              <a:rPr lang="da-DK" dirty="0" err="1"/>
+              <a:t>text</a:t>
+            </a:r>
+            <a:r>
+              <a:rPr lang="da-DK" dirty="0"/>
+              <a:t> data </a:t>
+            </a:r>
+            <a:r>
+              <a:rPr lang="da-DK" dirty="0" err="1"/>
+              <a:t>cannot</a:t>
+            </a:r>
+            <a:r>
+              <a:rPr lang="da-DK" dirty="0"/>
+              <a:t> </a:t>
+            </a:r>
+            <a:r>
+              <a:rPr lang="da-DK" dirty="0" err="1"/>
+              <a:t>be</a:t>
+            </a:r>
+            <a:r>
+              <a:rPr lang="da-DK" dirty="0"/>
+              <a:t> </a:t>
+            </a:r>
+            <a:r>
+              <a:rPr lang="da-DK" dirty="0" err="1"/>
+              <a:t>accessed</a:t>
+            </a:r>
+            <a:r>
+              <a:rPr lang="da-DK" dirty="0"/>
+              <a:t>… </a:t>
+            </a:r>
+            <a:r>
+              <a:rPr lang="da-DK" dirty="0" err="1"/>
+              <a:t>this</a:t>
+            </a:r>
+            <a:r>
+              <a:rPr lang="da-DK" dirty="0"/>
+              <a:t> </a:t>
+            </a:r>
+            <a:r>
+              <a:rPr lang="da-DK" dirty="0" err="1"/>
+              <a:t>one</a:t>
+            </a:r>
+            <a:r>
+              <a:rPr lang="da-DK" dirty="0"/>
+              <a:t> </a:t>
+            </a:r>
+            <a:r>
+              <a:rPr lang="da-DK" dirty="0" err="1"/>
+              <a:t>appreas</a:t>
+            </a:r>
+            <a:r>
+              <a:rPr lang="da-DK" dirty="0"/>
+              <a:t> </a:t>
+            </a:r>
+            <a:r>
+              <a:rPr lang="da-DK" dirty="0" err="1"/>
+              <a:t>both</a:t>
+            </a:r>
+            <a:r>
+              <a:rPr lang="da-DK" dirty="0"/>
+              <a:t> </a:t>
+            </a:r>
+            <a:r>
+              <a:rPr lang="da-DK" dirty="0" err="1"/>
+              <a:t>queries</a:t>
+            </a:r>
+            <a:r>
+              <a:rPr lang="da-DK" dirty="0"/>
+              <a:t> fiskeri and jagt.</a:t>
+            </a:r>
+          </a:p>
+          <a:p>
+            <a:r>
+              <a:rPr lang="da-DK" dirty="0"/>
+              <a:t>   fiskeri </a:t>
+            </a:r>
+            <a:r>
+              <a:rPr lang="da-DK" dirty="0">
+                <a:sym typeface="Wingdings" panose="05000000000000000000" pitchFamily="2" charset="2"/>
+              </a:rPr>
+              <a:t></a:t>
+            </a:r>
+            <a:r>
+              <a:rPr lang="da-DK" dirty="0"/>
+              <a:t>  1012 (1011)</a:t>
+            </a:r>
+          </a:p>
+          <a:p>
+            <a:pPr lvl="1"/>
+            <a:r>
+              <a:rPr lang="da-DK" dirty="0" err="1"/>
+              <a:t>Mentions</a:t>
+            </a:r>
+            <a:endParaRPr lang="da-DK" dirty="0"/>
+          </a:p>
+          <a:p>
+            <a:pPr lvl="2"/>
+            <a:r>
+              <a:rPr lang="da-DK" dirty="0"/>
+              <a:t>Harpun: 3</a:t>
+            </a:r>
+          </a:p>
+          <a:p>
+            <a:pPr lvl="2"/>
+            <a:r>
+              <a:rPr lang="da-DK" dirty="0"/>
+              <a:t>Kommercielt fisk: 3</a:t>
+            </a:r>
+          </a:p>
+          <a:p>
+            <a:pPr lvl="2"/>
+            <a:r>
+              <a:rPr lang="da-DK" dirty="0"/>
+              <a:t>erhvervsmæssigt fisk: 55</a:t>
+            </a:r>
+          </a:p>
+          <a:p>
+            <a:pPr lvl="2"/>
+            <a:r>
+              <a:rPr lang="da-DK" dirty="0"/>
+              <a:t>Erhvervsfisk: 57</a:t>
+            </a:r>
+          </a:p>
+          <a:p>
+            <a:pPr lvl="2"/>
+            <a:r>
+              <a:rPr lang="da-DK" dirty="0"/>
+              <a:t>rekreativt fisk: 10</a:t>
+            </a:r>
+          </a:p>
+          <a:p>
+            <a:r>
+              <a:rPr lang="da-DK" dirty="0"/>
+              <a:t>   jagt </a:t>
+            </a:r>
+            <a:r>
+              <a:rPr lang="da-DK" dirty="0">
+                <a:sym typeface="Wingdings" panose="05000000000000000000" pitchFamily="2" charset="2"/>
+              </a:rPr>
+              <a:t></a:t>
+            </a:r>
+            <a:r>
+              <a:rPr lang="da-DK" dirty="0"/>
+              <a:t>      347 (346)</a:t>
+            </a:r>
+          </a:p>
+          <a:p>
+            <a:pPr lvl="1"/>
+            <a:r>
+              <a:rPr lang="da-DK" dirty="0" err="1"/>
+              <a:t>Mentions</a:t>
+            </a:r>
+            <a:endParaRPr lang="da-DK" dirty="0"/>
+          </a:p>
+          <a:p>
+            <a:pPr lvl="2"/>
+            <a:r>
+              <a:rPr lang="da-DK" dirty="0"/>
+              <a:t>Sæl : 142</a:t>
+            </a:r>
+          </a:p>
+          <a:p>
+            <a:pPr lvl="2"/>
+            <a:r>
+              <a:rPr lang="da-DK" dirty="0"/>
+              <a:t>Fugle 175</a:t>
+            </a:r>
+          </a:p>
+          <a:p>
+            <a:r>
+              <a:rPr lang="da-DK" dirty="0"/>
+              <a:t>   </a:t>
+            </a:r>
+            <a:r>
+              <a:rPr lang="da-DK" dirty="0" err="1"/>
+              <a:t>søtrafik</a:t>
+            </a:r>
+            <a:r>
+              <a:rPr lang="da-DK" dirty="0"/>
+              <a:t> </a:t>
+            </a:r>
+            <a:r>
+              <a:rPr lang="da-DK" dirty="0">
+                <a:sym typeface="Wingdings" panose="05000000000000000000" pitchFamily="2" charset="2"/>
+              </a:rPr>
+              <a:t></a:t>
+            </a:r>
+            <a:r>
+              <a:rPr lang="da-DK" dirty="0"/>
+              <a:t> 8</a:t>
+            </a:r>
+          </a:p>
+        </p:txBody>
+      </p:sp>
+    </p:spTree>
+    <p:extLst>
+      <p:ext uri="{BB962C8B-B14F-4D97-AF65-F5344CB8AC3E}">
+        <p14:creationId xmlns:p14="http://schemas.microsoft.com/office/powerpoint/2010/main" val="2860727605"/>
+      </p:ext>
+    </p:extLst>
+  </p:cSld>
+  <p:clrMapOvr>
+    <a:masterClrMapping/>
+  </p:clrMapOvr>
+</p:sld>
+</file>
+
+<file path=ppt/slides/slide4.xml><?xml version="1.0" encoding="utf-8"?>
+<p:sld xmlns:a="http://schemas.openxmlformats.org/drawingml/2006/main" xmlns:r="http://schemas.openxmlformats.org/officeDocument/2006/relationships" xmlns:p="http://schemas.openxmlformats.org/presentationml/2006/main">
+  <p:cSld>
+    <p:spTree>
+      <p:nvGrpSpPr>
+        <p:cNvPr id="1" name=""/>
+        <p:cNvGrpSpPr/>
+        <p:nvPr/>
+      </p:nvGrpSpPr>
+      <p:grpSpPr>
+        <a:xfrm>
+          <a:off x="0" y="0"/>
+          <a:ext cx="0" cy="0"/>
+          <a:chOff x="0" y="0"/>
+          <a:chExt cx="0" cy="0"/>
+        </a:xfrm>
+      </p:grpSpPr>
+      <p:sp>
+        <p:nvSpPr>
+          <p:cNvPr id="2" name="Title 1">
+            <a:extLst>
+              <a:ext uri="{FF2B5EF4-FFF2-40B4-BE49-F238E27FC236}">
                 <a16:creationId xmlns:a16="http://schemas.microsoft.com/office/drawing/2014/main" id="{2F033A66-E0B3-3C8C-BB3D-B857B253BE5C}"/>
               </a:ext>
             </a:extLst>
@@ -3969,7 +4462,9 @@
         </p:nvSpPr>
         <p:spPr/>
         <p:txBody>
-          <a:bodyPr/>
+          <a:bodyPr>
+            <a:normAutofit/>
+          </a:bodyPr>
           <a:lstStyle/>
           <a:p>
             <a:r>
@@ -4000,32 +4495,678 @@
               <a:rPr lang="da-DK" dirty="0" err="1"/>
               <a:t>text</a:t>
             </a:r>
+            <a:br>
+              <a:rPr lang="da-DK" dirty="0"/>
+            </a:br>
+            <a:r>
+              <a:rPr lang="da-DK" sz="2000" dirty="0">
+                <a:hlinkClick r:id="rId2"/>
+              </a:rPr>
+              <a:t>https://www.retsinformation.dk/offentlig/indberetningsskemaer/Vejledning%20til%20indberetningsskema.pdf</a:t>
+            </a:r>
+            <a:r>
+              <a:rPr lang="da-DK" sz="2000" dirty="0"/>
+              <a:t> </a:t>
+            </a:r>
+          </a:p>
+        </p:txBody>
+      </p:sp>
+      <p:sp>
+        <p:nvSpPr>
+          <p:cNvPr id="4" name="TextBox 3">
+            <a:extLst>
+              <a:ext uri="{FF2B5EF4-FFF2-40B4-BE49-F238E27FC236}">
+                <a16:creationId xmlns:a16="http://schemas.microsoft.com/office/drawing/2014/main" id="{5DE8078F-3D5D-C3C0-E0B0-8FED5D08C3CA}"/>
+              </a:ext>
+            </a:extLst>
+          </p:cNvPr>
+          <p:cNvSpPr txBox="1"/>
+          <p:nvPr/>
+        </p:nvSpPr>
+        <p:spPr>
+          <a:xfrm>
+            <a:off x="7154200" y="1937782"/>
+            <a:ext cx="4950394" cy="4524315"/>
+          </a:xfrm>
+          <a:prstGeom prst="rect">
+            <a:avLst/>
+          </a:prstGeom>
+          <a:noFill/>
+        </p:spPr>
+        <p:txBody>
+          <a:bodyPr wrap="none" rtlCol="0">
+            <a:spAutoFit/>
+          </a:bodyPr>
+          <a:lstStyle/>
+          <a:p>
+            <a:pPr marL="285750" indent="-285750">
+              <a:buFont typeface="Arial" panose="020B0604020202020204" pitchFamily="34" charset="0"/>
+              <a:buChar char="•"/>
+            </a:pPr>
+            <a:r>
+              <a:rPr lang="da-DK" b="1" dirty="0" err="1"/>
+              <a:t>UnderskriftDato</a:t>
+            </a:r>
+            <a:r>
+              <a:rPr lang="da-DK" dirty="0"/>
+              <a:t>: </a:t>
+            </a:r>
+            <a:r>
+              <a:rPr lang="da-DK" dirty="0" err="1"/>
+              <a:t>signature</a:t>
+            </a:r>
+            <a:r>
+              <a:rPr lang="da-DK" dirty="0"/>
+              <a:t> date</a:t>
+            </a:r>
+          </a:p>
+          <a:p>
+            <a:pPr marL="285750" indent="-285750">
+              <a:buFont typeface="Arial" panose="020B0604020202020204" pitchFamily="34" charset="0"/>
+              <a:buChar char="•"/>
+            </a:pPr>
+            <a:r>
+              <a:rPr lang="da-DK" b="1" dirty="0" err="1"/>
+              <a:t>PubliceretTidspunkt</a:t>
+            </a:r>
+            <a:r>
+              <a:rPr lang="da-DK" dirty="0"/>
+              <a:t>: </a:t>
+            </a:r>
+            <a:r>
+              <a:rPr lang="da-DK" dirty="0" err="1"/>
+              <a:t>Published</a:t>
+            </a:r>
+            <a:r>
+              <a:rPr lang="da-DK" dirty="0"/>
+              <a:t> time	</a:t>
+            </a:r>
+          </a:p>
+          <a:p>
+            <a:pPr marL="285750" indent="-285750">
+              <a:buFont typeface="Arial" panose="020B0604020202020204" pitchFamily="34" charset="0"/>
+              <a:buChar char="•"/>
+            </a:pPr>
+            <a:r>
+              <a:rPr lang="da-DK" b="1" dirty="0" err="1"/>
+              <a:t>SidstPubliceretTidspunkt</a:t>
+            </a:r>
+            <a:r>
+              <a:rPr lang="da-DK" dirty="0"/>
+              <a:t>: last </a:t>
+            </a:r>
+            <a:r>
+              <a:rPr lang="da-DK" dirty="0" err="1"/>
+              <a:t>published</a:t>
+            </a:r>
+            <a:r>
+              <a:rPr lang="da-DK" dirty="0"/>
+              <a:t> time </a:t>
+            </a:r>
+          </a:p>
+          <a:p>
+            <a:pPr marL="285750" indent="-285750">
+              <a:buFont typeface="Arial" panose="020B0604020202020204" pitchFamily="34" charset="0"/>
+              <a:buChar char="•"/>
+            </a:pPr>
+            <a:r>
+              <a:rPr lang="da-DK" b="1" dirty="0" err="1"/>
+              <a:t>BekendtgørelsesDato</a:t>
+            </a:r>
+            <a:r>
+              <a:rPr lang="da-DK" dirty="0"/>
+              <a:t>: </a:t>
+            </a:r>
+            <a:r>
+              <a:rPr lang="da-DK" dirty="0" err="1"/>
+              <a:t>promulgation</a:t>
+            </a:r>
+            <a:r>
+              <a:rPr lang="da-DK" dirty="0"/>
+              <a:t> date</a:t>
+            </a:r>
+          </a:p>
+          <a:p>
+            <a:pPr marL="285750" indent="-285750">
+              <a:buFont typeface="Arial" panose="020B0604020202020204" pitchFamily="34" charset="0"/>
+              <a:buChar char="•"/>
+            </a:pPr>
+            <a:r>
+              <a:rPr lang="da-DK" b="1" dirty="0" err="1"/>
+              <a:t>HistoriskDato</a:t>
+            </a:r>
+            <a:r>
+              <a:rPr lang="da-DK" dirty="0"/>
+              <a:t>: </a:t>
+            </a:r>
+            <a:r>
+              <a:rPr lang="da-DK" dirty="0" err="1"/>
+              <a:t>historic</a:t>
+            </a:r>
+            <a:r>
+              <a:rPr lang="da-DK" dirty="0"/>
+              <a:t> date	</a:t>
+            </a:r>
+          </a:p>
+          <a:p>
+            <a:pPr marL="285750" indent="-285750">
+              <a:buFont typeface="Arial" panose="020B0604020202020204" pitchFamily="34" charset="0"/>
+              <a:buChar char="•"/>
+            </a:pPr>
+            <a:r>
+              <a:rPr lang="da-DK" b="1" dirty="0"/>
+              <a:t>Historisk</a:t>
+            </a:r>
+            <a:r>
+              <a:rPr lang="da-DK" dirty="0"/>
+              <a:t>:	</a:t>
+            </a:r>
+          </a:p>
+          <a:p>
+            <a:pPr marL="285750" indent="-285750">
+              <a:buFont typeface="Arial" panose="020B0604020202020204" pitchFamily="34" charset="0"/>
+              <a:buChar char="•"/>
+            </a:pPr>
+            <a:r>
+              <a:rPr lang="da-DK" b="1" dirty="0" err="1"/>
+              <a:t>RedaktionelNote</a:t>
+            </a:r>
+            <a:r>
+              <a:rPr lang="da-DK" dirty="0"/>
+              <a:t>: </a:t>
+            </a:r>
+            <a:r>
+              <a:rPr lang="da-DK" dirty="0" err="1"/>
+              <a:t>editorial</a:t>
+            </a:r>
+            <a:r>
+              <a:rPr lang="da-DK" dirty="0"/>
+              <a:t> note	</a:t>
+            </a:r>
+          </a:p>
+          <a:p>
+            <a:pPr marL="285750" indent="-285750">
+              <a:buFont typeface="Arial" panose="020B0604020202020204" pitchFamily="34" charset="0"/>
+              <a:buChar char="•"/>
+            </a:pPr>
+            <a:r>
+              <a:rPr lang="da-DK" b="1" dirty="0" err="1"/>
+              <a:t>OmtryksNote</a:t>
+            </a:r>
+            <a:r>
+              <a:rPr lang="da-DK" dirty="0"/>
+              <a:t>: </a:t>
+            </a:r>
+            <a:r>
+              <a:rPr lang="da-DK" dirty="0" err="1"/>
+              <a:t>reprint</a:t>
+            </a:r>
+            <a:r>
+              <a:rPr lang="da-DK" dirty="0"/>
+              <a:t> note</a:t>
+            </a:r>
+          </a:p>
+          <a:p>
+            <a:pPr marL="285750" indent="-285750">
+              <a:buFont typeface="Arial" panose="020B0604020202020204" pitchFamily="34" charset="0"/>
+              <a:buChar char="•"/>
+            </a:pPr>
+            <a:r>
+              <a:rPr lang="da-DK" b="1" dirty="0" err="1"/>
+              <a:t>AlternativeMedierNote</a:t>
+            </a:r>
+            <a:r>
+              <a:rPr lang="da-DK" dirty="0"/>
+              <a:t>: alternative media note</a:t>
+            </a:r>
+          </a:p>
+          <a:p>
+            <a:pPr marL="285750" indent="-285750">
+              <a:buFont typeface="Arial" panose="020B0604020202020204" pitchFamily="34" charset="0"/>
+              <a:buChar char="•"/>
+            </a:pPr>
+            <a:r>
+              <a:rPr lang="da-DK" b="1" dirty="0" err="1"/>
+              <a:t>AnfoerINote</a:t>
+            </a:r>
+            <a:r>
+              <a:rPr lang="da-DK" dirty="0"/>
+              <a:t>	</a:t>
+            </a:r>
+          </a:p>
+          <a:p>
+            <a:pPr marL="285750" indent="-285750">
+              <a:buFont typeface="Arial" panose="020B0604020202020204" pitchFamily="34" charset="0"/>
+              <a:buChar char="•"/>
+            </a:pPr>
+            <a:r>
+              <a:rPr lang="da-DK" b="1" dirty="0" err="1"/>
+              <a:t>HjemmelVedroerer</a:t>
+            </a:r>
+            <a:r>
+              <a:rPr lang="da-DK" dirty="0"/>
+              <a:t>	</a:t>
+            </a:r>
+          </a:p>
+          <a:p>
+            <a:pPr marL="285750" indent="-285750">
+              <a:buFont typeface="Arial" panose="020B0604020202020204" pitchFamily="34" charset="0"/>
+              <a:buChar char="•"/>
+            </a:pPr>
+            <a:r>
+              <a:rPr lang="da-DK" b="1" dirty="0" err="1"/>
+              <a:t>SenereAendringer</a:t>
+            </a:r>
+            <a:r>
+              <a:rPr lang="da-DK" dirty="0"/>
+              <a:t>: </a:t>
+            </a:r>
+            <a:r>
+              <a:rPr lang="da-DK" dirty="0" err="1"/>
+              <a:t>later</a:t>
+            </a:r>
+            <a:r>
+              <a:rPr lang="da-DK" dirty="0"/>
+              <a:t> </a:t>
+            </a:r>
+            <a:r>
+              <a:rPr lang="da-DK" dirty="0" err="1"/>
+              <a:t>changes</a:t>
+            </a:r>
+            <a:r>
+              <a:rPr lang="da-DK" dirty="0"/>
+              <a:t>	</a:t>
+            </a:r>
+          </a:p>
+          <a:p>
+            <a:pPr marL="285750" indent="-285750">
+              <a:buFont typeface="Arial" panose="020B0604020202020204" pitchFamily="34" charset="0"/>
+              <a:buChar char="•"/>
+            </a:pPr>
+            <a:r>
+              <a:rPr lang="da-DK" b="1" dirty="0" err="1"/>
+              <a:t>ÆndrerI</a:t>
+            </a:r>
+            <a:r>
+              <a:rPr lang="da-DK" dirty="0"/>
+              <a:t>	</a:t>
+            </a:r>
+          </a:p>
+          <a:p>
+            <a:pPr marL="285750" indent="-285750">
+              <a:buFont typeface="Arial" panose="020B0604020202020204" pitchFamily="34" charset="0"/>
+              <a:buChar char="•"/>
+            </a:pPr>
+            <a:r>
+              <a:rPr lang="da-DK" b="1" dirty="0"/>
+              <a:t>Tiltræder</a:t>
+            </a:r>
+            <a:r>
+              <a:rPr lang="da-DK" dirty="0"/>
+              <a:t>	</a:t>
+            </a:r>
+          </a:p>
+          <a:p>
+            <a:pPr marL="285750" indent="-285750">
+              <a:buFont typeface="Arial" panose="020B0604020202020204" pitchFamily="34" charset="0"/>
+              <a:buChar char="•"/>
+            </a:pPr>
+            <a:r>
+              <a:rPr lang="da-DK" b="1" dirty="0" err="1"/>
+              <a:t>EliUrl</a:t>
+            </a:r>
+            <a:r>
+              <a:rPr lang="da-DK" b="1" dirty="0"/>
+              <a:t>: </a:t>
+            </a:r>
+            <a:r>
+              <a:rPr lang="da-DK" dirty="0"/>
+              <a:t>European Legislative </a:t>
+            </a:r>
+            <a:r>
+              <a:rPr lang="da-DK" dirty="0" err="1"/>
+              <a:t>Identifier</a:t>
+            </a:r>
+            <a:r>
+              <a:rPr lang="da-DK" dirty="0"/>
+              <a:t> url</a:t>
+            </a:r>
+          </a:p>
+          <a:p>
             <a:endParaRPr lang="da-DK" dirty="0"/>
           </a:p>
         </p:txBody>
       </p:sp>
       <p:sp>
         <p:nvSpPr>
-          <p:cNvPr id="3" name="Content Placeholder 2">
-            <a:extLst>
-              <a:ext uri="{FF2B5EF4-FFF2-40B4-BE49-F238E27FC236}">
-                <a16:creationId xmlns:a16="http://schemas.microsoft.com/office/drawing/2014/main" id="{49D53334-4D21-9267-1C8D-1955C76B4103}"/>
-              </a:ext>
-            </a:extLst>
-          </p:cNvPr>
-          <p:cNvSpPr>
-            <a:spLocks noGrp="1"/>
-          </p:cNvSpPr>
-          <p:nvPr>
-            <p:ph idx="1"/>
-          </p:nvPr>
-        </p:nvSpPr>
-        <p:spPr/>
-        <p:txBody>
-          <a:bodyPr/>
-          <a:lstStyle/>
-          <a:p>
+          <p:cNvPr id="5" name="TextBox 4">
+            <a:extLst>
+              <a:ext uri="{FF2B5EF4-FFF2-40B4-BE49-F238E27FC236}">
+                <a16:creationId xmlns:a16="http://schemas.microsoft.com/office/drawing/2014/main" id="{6F88A932-6CB1-CC6B-BEA2-E9DF51336AA3}"/>
+              </a:ext>
+            </a:extLst>
+          </p:cNvPr>
+          <p:cNvSpPr txBox="1"/>
+          <p:nvPr/>
+        </p:nvSpPr>
+        <p:spPr>
+          <a:xfrm>
+            <a:off x="335981" y="1937782"/>
+            <a:ext cx="6998198" cy="4555093"/>
+          </a:xfrm>
+          <a:prstGeom prst="rect">
+            <a:avLst/>
+          </a:prstGeom>
+          <a:noFill/>
+        </p:spPr>
+        <p:txBody>
+          <a:bodyPr wrap="none" rtlCol="0">
+            <a:spAutoFit/>
+          </a:bodyPr>
+          <a:lstStyle/>
+          <a:p>
+            <a:pPr marL="285750" indent="-285750">
+              <a:buFont typeface="Arial" panose="020B0604020202020204" pitchFamily="34" charset="0"/>
+              <a:buChar char="•"/>
+            </a:pPr>
+            <a:r>
+              <a:rPr lang="da-DK" b="1" dirty="0"/>
+              <a:t>Rank</a:t>
+            </a:r>
+            <a:r>
+              <a:rPr lang="da-DK" dirty="0"/>
+              <a:t>	</a:t>
+            </a:r>
+          </a:p>
+          <a:p>
+            <a:pPr marL="285750" indent="-285750">
+              <a:buFont typeface="Arial" panose="020B0604020202020204" pitchFamily="34" charset="0"/>
+              <a:buChar char="•"/>
+            </a:pPr>
+            <a:r>
+              <a:rPr lang="da-DK" b="1" dirty="0" err="1"/>
+              <a:t>DokumentType</a:t>
+            </a:r>
+            <a:r>
+              <a:rPr lang="da-DK" dirty="0"/>
+              <a:t>: </a:t>
+            </a:r>
+            <a:r>
+              <a:rPr lang="da-DK" dirty="0" err="1"/>
+              <a:t>document</a:t>
+            </a:r>
+            <a:r>
+              <a:rPr lang="da-DK" dirty="0"/>
+              <a:t> type</a:t>
+            </a:r>
+          </a:p>
+          <a:p>
+            <a:r>
+              <a:rPr lang="da-DK" dirty="0"/>
+              <a:t> </a:t>
+            </a:r>
+            <a:r>
+              <a:rPr lang="da-DK" dirty="0">
+                <a:hlinkClick r:id="rId3"/>
+              </a:rPr>
+              <a:t>https://www.retsinformation.dk/eli/resource/authority/type_document</a:t>
+            </a:r>
+            <a:r>
+              <a:rPr lang="da-DK" dirty="0"/>
+              <a:t> </a:t>
+            </a:r>
+          </a:p>
+          <a:p>
+            <a:pPr marL="285750" indent="-285750">
+              <a:buFont typeface="Arial" panose="020B0604020202020204" pitchFamily="34" charset="0"/>
+              <a:buChar char="•"/>
+            </a:pPr>
+            <a:r>
+              <a:rPr lang="da-DK" b="1" dirty="0"/>
+              <a:t>Titel</a:t>
+            </a:r>
+            <a:r>
+              <a:rPr lang="da-DK" dirty="0"/>
+              <a:t>	</a:t>
+            </a:r>
+          </a:p>
+          <a:p>
+            <a:pPr marL="285750" indent="-285750">
+              <a:buFont typeface="Arial" panose="020B0604020202020204" pitchFamily="34" charset="0"/>
+              <a:buChar char="•"/>
+            </a:pPr>
+            <a:r>
+              <a:rPr lang="da-DK" b="1" dirty="0" err="1"/>
+              <a:t>PopulærTitel</a:t>
+            </a:r>
+            <a:r>
+              <a:rPr lang="da-DK" dirty="0"/>
+              <a:t>	</a:t>
+            </a:r>
+          </a:p>
+          <a:p>
+            <a:pPr marL="285750" indent="-285750">
+              <a:buFont typeface="Arial" panose="020B0604020202020204" pitchFamily="34" charset="0"/>
+              <a:buChar char="•"/>
+            </a:pPr>
+            <a:r>
+              <a:rPr lang="da-DK" b="1" dirty="0"/>
+              <a:t>Ressort</a:t>
+            </a:r>
+            <a:r>
+              <a:rPr lang="da-DK" dirty="0"/>
+              <a:t>: Department	</a:t>
+            </a:r>
+          </a:p>
+          <a:p>
+            <a:pPr marL="285750" indent="-285750">
+              <a:buFont typeface="Arial" panose="020B0604020202020204" pitchFamily="34" charset="0"/>
+              <a:buChar char="•"/>
+            </a:pPr>
+            <a:r>
+              <a:rPr lang="da-DK" b="1" dirty="0" err="1"/>
+              <a:t>AdministrerendeMyndighed</a:t>
+            </a:r>
+            <a:r>
+              <a:rPr lang="da-DK" dirty="0"/>
+              <a:t>: </a:t>
+            </a:r>
+            <a:r>
+              <a:rPr lang="da-DK" dirty="0" err="1"/>
+              <a:t>administering</a:t>
+            </a:r>
+            <a:r>
+              <a:rPr lang="da-DK" dirty="0"/>
+              <a:t> </a:t>
+            </a:r>
+            <a:r>
+              <a:rPr lang="da-DK" dirty="0" err="1"/>
+              <a:t>authority</a:t>
+            </a:r>
+            <a:r>
+              <a:rPr lang="da-DK" dirty="0"/>
+              <a:t>	</a:t>
+            </a:r>
+          </a:p>
+          <a:p>
+            <a:pPr marL="285750" indent="-285750">
+              <a:buFont typeface="Arial" panose="020B0604020202020204" pitchFamily="34" charset="0"/>
+              <a:buChar char="•"/>
+            </a:pPr>
+            <a:r>
+              <a:rPr lang="da-DK" b="1" dirty="0" err="1"/>
+              <a:t>JournalNummer</a:t>
+            </a:r>
+            <a:r>
+              <a:rPr lang="da-DK" dirty="0"/>
+              <a:t>: journal </a:t>
+            </a:r>
+            <a:r>
+              <a:rPr lang="da-DK" dirty="0" err="1"/>
+              <a:t>number</a:t>
+            </a:r>
             <a:endParaRPr lang="da-DK" dirty="0"/>
+          </a:p>
+          <a:p>
+            <a:pPr marL="285750" indent="-285750">
+              <a:buFont typeface="Arial" panose="020B0604020202020204" pitchFamily="34" charset="0"/>
+              <a:buChar char="•"/>
+            </a:pPr>
+            <a:r>
+              <a:rPr lang="da-DK" b="1" dirty="0"/>
+              <a:t>Nummer</a:t>
+            </a:r>
+            <a:r>
+              <a:rPr lang="da-DK" dirty="0"/>
+              <a:t>: </a:t>
+            </a:r>
+            <a:r>
+              <a:rPr lang="da-DK" dirty="0" err="1"/>
+              <a:t>number</a:t>
+            </a:r>
+            <a:r>
+              <a:rPr lang="da-DK" dirty="0"/>
+              <a:t>	</a:t>
+            </a:r>
+          </a:p>
+          <a:p>
+            <a:pPr marL="285750" indent="-285750">
+              <a:buFont typeface="Arial" panose="020B0604020202020204" pitchFamily="34" charset="0"/>
+              <a:buChar char="•"/>
+            </a:pPr>
+            <a:r>
+              <a:rPr lang="da-DK" b="1" dirty="0"/>
+              <a:t>År</a:t>
+            </a:r>
+            <a:r>
+              <a:rPr lang="da-DK" dirty="0"/>
+              <a:t>: </a:t>
+            </a:r>
+            <a:r>
+              <a:rPr lang="da-DK" dirty="0" err="1"/>
+              <a:t>year</a:t>
+            </a:r>
+            <a:r>
+              <a:rPr lang="da-DK" dirty="0"/>
+              <a:t>	</a:t>
+            </a:r>
+          </a:p>
+          <a:p>
+            <a:pPr marL="285750" indent="-285750">
+              <a:buFont typeface="Arial" panose="020B0604020202020204" pitchFamily="34" charset="0"/>
+              <a:buChar char="•"/>
+            </a:pPr>
+            <a:r>
+              <a:rPr lang="da-DK" b="1" dirty="0" err="1"/>
+              <a:t>DokumentId</a:t>
+            </a:r>
+            <a:r>
+              <a:rPr lang="da-DK" dirty="0"/>
+              <a:t>: </a:t>
+            </a:r>
+            <a:r>
+              <a:rPr lang="da-DK" dirty="0" err="1"/>
+              <a:t>document</a:t>
+            </a:r>
+            <a:r>
+              <a:rPr lang="da-DK" dirty="0"/>
+              <a:t> id</a:t>
+            </a:r>
+          </a:p>
+          <a:p>
+            <a:pPr marL="285750" indent="-285750">
+              <a:buFont typeface="Arial" panose="020B0604020202020204" pitchFamily="34" charset="0"/>
+              <a:buChar char="•"/>
+            </a:pPr>
+            <a:r>
+              <a:rPr lang="da-DK" b="1" dirty="0"/>
+              <a:t>ACCN</a:t>
+            </a:r>
+            <a:r>
+              <a:rPr lang="da-DK" dirty="0"/>
+              <a:t>	</a:t>
+            </a:r>
+          </a:p>
+          <a:p>
+            <a:pPr marL="285750" indent="-285750">
+              <a:buFont typeface="Arial" panose="020B0604020202020204" pitchFamily="34" charset="0"/>
+              <a:buChar char="•"/>
+            </a:pPr>
+            <a:r>
+              <a:rPr lang="da-DK" b="1" dirty="0"/>
+              <a:t>Publiceringsmedie</a:t>
+            </a:r>
+            <a:r>
+              <a:rPr lang="da-DK" dirty="0"/>
+              <a:t>: </a:t>
+            </a:r>
+            <a:r>
+              <a:rPr lang="da-DK" dirty="0" err="1"/>
+              <a:t>publication</a:t>
+            </a:r>
+            <a:r>
+              <a:rPr lang="da-DK" dirty="0"/>
+              <a:t> medium	</a:t>
+            </a:r>
+          </a:p>
+          <a:p>
+            <a:pPr marL="285750" indent="-285750">
+              <a:buFont typeface="Arial" panose="020B0604020202020204" pitchFamily="34" charset="0"/>
+              <a:buChar char="•"/>
+            </a:pPr>
+            <a:r>
+              <a:rPr lang="da-DK" b="1" dirty="0" err="1"/>
+              <a:t>UndtagetFraOffentliggørelse</a:t>
+            </a:r>
+            <a:r>
+              <a:rPr lang="da-DK" dirty="0"/>
+              <a:t>: </a:t>
+            </a:r>
+            <a:r>
+              <a:rPr lang="da-DK" dirty="0" err="1"/>
+              <a:t>accpeted</a:t>
+            </a:r>
+            <a:r>
+              <a:rPr lang="da-DK" dirty="0"/>
+              <a:t> from disclosure</a:t>
+            </a:r>
+          </a:p>
+          <a:p>
+            <a:pPr marL="285750" indent="-285750">
+              <a:buFont typeface="Arial" panose="020B0604020202020204" pitchFamily="34" charset="0"/>
+              <a:buChar char="•"/>
+            </a:pPr>
+            <a:r>
+              <a:rPr lang="da-DK" sz="1800" b="1" dirty="0" err="1"/>
+              <a:t>GeografiskDækning</a:t>
+            </a:r>
+            <a:r>
+              <a:rPr lang="da-DK" sz="1800" dirty="0"/>
+              <a:t>: </a:t>
+            </a:r>
+            <a:r>
+              <a:rPr lang="da-DK" sz="1800" dirty="0" err="1"/>
+              <a:t>geographic</a:t>
+            </a:r>
+            <a:r>
+              <a:rPr lang="da-DK" sz="1800" dirty="0"/>
+              <a:t> </a:t>
+            </a:r>
+            <a:r>
+              <a:rPr lang="da-DK" sz="1800" dirty="0" err="1"/>
+              <a:t>coverage</a:t>
+            </a:r>
+            <a:r>
+              <a:rPr lang="da-DK" sz="2000" dirty="0"/>
+              <a:t>	</a:t>
+            </a:r>
+            <a:endParaRPr lang="da-DK" dirty="0"/>
+          </a:p>
+          <a:p>
+            <a:r>
+              <a:rPr lang="da-DK" dirty="0"/>
+              <a:t>	</a:t>
+            </a:r>
           </a:p>
         </p:txBody>
       </p:sp>
@@ -4042,7 +5183,7 @@
 </p:sld>
 </file>
 
-<file path=ppt/slides/slide4.xml><?xml version="1.0" encoding="utf-8"?>
+<file path=ppt/slides/slide5.xml><?xml version="1.0" encoding="utf-8"?>
 <p:sld xmlns:a="http://schemas.openxmlformats.org/drawingml/2006/main" xmlns:r="http://schemas.openxmlformats.org/officeDocument/2006/relationships" xmlns:p="http://schemas.openxmlformats.org/presentationml/2006/main">
   <p:cSld>
     <p:spTree>
